--- a/docs/presentations/BakeryT_Operations_Manual.pptx
+++ b/docs/presentations/BakeryT_Operations_Manual.pptx
@@ -4030,7 +4030,7 @@
           </p:nvPr>
         </p:nvGraphicFramePr>
         <p:xfrm>
-          <a:off x="566928" y="1554480"/>
+          <a:off x="566928" y="1600200"/>
           <a:ext cx="11055096" cy="914400"/>
         </p:xfrm>
         <a:graphic>
@@ -4038,12 +4038,12 @@
             <a:tbl>
               <a:tblPr/>
               <a:tblGrid>
-                <a:gridCol w="1828800"/>
-                <a:gridCol w="5577840"/>
-                <a:gridCol w="1188720"/>
+                <a:gridCol w="1920240"/>
+                <a:gridCol w="5394960"/>
+                <a:gridCol w="1280160"/>
                 <a:gridCol w="2459736"/>
               </a:tblGrid>
-              <a:tr h="566928">
+              <a:tr h="777240">
                 <a:tc>
                   <a:txBody>
                     <a:bodyPr/>
@@ -4053,7 +4053,7 @@
                         <a:buNone/>
                       </a:pPr>
                       <a:r>
-                        <a:rPr lang="en-US" sz="1250" b="1" dirty="0">
+                        <a:rPr lang="en-US" sz="1600" b="1" dirty="0">
                           <a:solidFill>
                             <a:srgbClr val="FFFFFF"/>
                           </a:solidFill>
@@ -4063,7 +4063,7 @@
                         </a:rPr>
                         <a:t>역할</a:t>
                       </a:r>
-                      <a:endParaRPr lang="en-US" sz="1250" dirty="0">
+                      <a:endParaRPr lang="en-US" sz="1600" dirty="0">
                         <a:latin typeface="Malgun Gothic" charset="0"/>
                         <a:ea typeface="Malgun Gothic" charset="0"/>
                         <a:cs typeface="Malgun Gothic" charset="0"/>
@@ -4121,7 +4121,7 @@
                         <a:buNone/>
                       </a:pPr>
                       <a:r>
-                        <a:rPr lang="en-US" sz="1250" b="1" dirty="0">
+                        <a:rPr lang="en-US" sz="1600" b="1" dirty="0">
                           <a:solidFill>
                             <a:srgbClr val="FFFFFF"/>
                           </a:solidFill>
@@ -4131,7 +4131,7 @@
                         </a:rPr>
                         <a:t>하는 일</a:t>
                       </a:r>
-                      <a:endParaRPr lang="en-US" sz="1250" dirty="0">
+                      <a:endParaRPr lang="en-US" sz="1600" dirty="0">
                         <a:latin typeface="Malgun Gothic" charset="0"/>
                         <a:ea typeface="Malgun Gothic" charset="0"/>
                         <a:cs typeface="Malgun Gothic" charset="0"/>
@@ -4189,7 +4189,7 @@
                         <a:buNone/>
                       </a:pPr>
                       <a:r>
-                        <a:rPr lang="en-US" sz="1250" b="1" dirty="0">
+                        <a:rPr lang="en-US" sz="1600" b="1" dirty="0">
                           <a:solidFill>
                             <a:srgbClr val="FFFFFF"/>
                           </a:solidFill>
@@ -4199,7 +4199,7 @@
                         </a:rPr>
                         <a:t>시간</a:t>
                       </a:r>
-                      <a:endParaRPr lang="en-US" sz="1250" dirty="0">
+                      <a:endParaRPr lang="en-US" sz="1600" dirty="0">
                         <a:latin typeface="Malgun Gothic" charset="0"/>
                         <a:ea typeface="Malgun Gothic" charset="0"/>
                         <a:cs typeface="Malgun Gothic" charset="0"/>
@@ -4257,7 +4257,7 @@
                         <a:buNone/>
                       </a:pPr>
                       <a:r>
-                        <a:rPr lang="en-US" sz="1250" b="1" dirty="0">
+                        <a:rPr lang="en-US" sz="1600" b="1" dirty="0">
                           <a:solidFill>
                             <a:srgbClr val="FFFFFF"/>
                           </a:solidFill>
@@ -4267,7 +4267,7 @@
                         </a:rPr>
                         <a:t>주 화면</a:t>
                       </a:r>
-                      <a:endParaRPr lang="en-US" sz="1250" dirty="0">
+                      <a:endParaRPr lang="en-US" sz="1600" dirty="0">
                         <a:latin typeface="Malgun Gothic" charset="0"/>
                         <a:ea typeface="Malgun Gothic" charset="0"/>
                         <a:cs typeface="Malgun Gothic" charset="0"/>
@@ -4317,7 +4317,7 @@
                   </a:tcPr>
                 </a:tc>
               </a:tr>
-              <a:tr h="566928">
+              <a:tr h="777240">
                 <a:tc>
                   <a:txBody>
                     <a:bodyPr/>
@@ -4327,7 +4327,7 @@
                         <a:buNone/>
                       </a:pPr>
                       <a:r>
-                        <a:rPr lang="en-US" sz="1250" b="1" dirty="0">
+                        <a:rPr lang="en-US" sz="1600" b="1" dirty="0">
                           <a:solidFill>
                             <a:srgbClr val="6E3A1C"/>
                           </a:solidFill>
@@ -4337,7 +4337,7 @@
                         </a:rPr>
                         <a:t>스튜어드</a:t>
                       </a:r>
-                      <a:endParaRPr lang="en-US" sz="1250" dirty="0">
+                      <a:endParaRPr lang="en-US" sz="1600" dirty="0">
                         <a:latin typeface="Malgun Gothic" charset="0"/>
                         <a:ea typeface="Malgun Gothic" charset="0"/>
                         <a:cs typeface="Malgun Gothic" charset="0"/>
@@ -4395,7 +4395,7 @@
                         <a:buNone/>
                       </a:pPr>
                       <a:r>
-                        <a:rPr lang="en-US" sz="1250" dirty="0">
+                        <a:rPr lang="en-US" sz="1500" dirty="0">
                           <a:solidFill>
                             <a:srgbClr val="2E241C"/>
                           </a:solidFill>
@@ -4405,7 +4405,7 @@
                         </a:rPr>
                         <a:t>격리 큐 확정(새 어휘 매핑) · 품질 리포트 조치 · 데이터 반입</a:t>
                       </a:r>
-                      <a:endParaRPr lang="en-US" sz="1250" dirty="0">
+                      <a:endParaRPr lang="en-US" sz="1500" dirty="0">
                         <a:latin typeface="Malgun Gothic" charset="0"/>
                         <a:ea typeface="Malgun Gothic" charset="0"/>
                         <a:cs typeface="Malgun Gothic" charset="0"/>
@@ -4463,7 +4463,7 @@
                         <a:buNone/>
                       </a:pPr>
                       <a:r>
-                        <a:rPr lang="en-US" sz="1250" dirty="0">
+                        <a:rPr lang="en-US" sz="1500" b="1" dirty="0">
                           <a:solidFill>
                             <a:srgbClr val="2E241C"/>
                           </a:solidFill>
@@ -4473,7 +4473,7 @@
                         </a:rPr>
                         <a:t>일 30분</a:t>
                       </a:r>
-                      <a:endParaRPr lang="en-US" sz="1250" dirty="0">
+                      <a:endParaRPr lang="en-US" sz="1500" dirty="0">
                         <a:latin typeface="Malgun Gothic" charset="0"/>
                         <a:ea typeface="Malgun Gothic" charset="0"/>
                         <a:cs typeface="Malgun Gothic" charset="0"/>
@@ -4531,7 +4531,7 @@
                         <a:buNone/>
                       </a:pPr>
                       <a:r>
-                        <a:rPr lang="en-US" sz="1250" dirty="0">
+                        <a:rPr lang="en-US" sz="1500" dirty="0">
                           <a:solidFill>
                             <a:srgbClr val="2E241C"/>
                           </a:solidFill>
@@ -4541,7 +4541,7 @@
                         </a:rPr>
                         <a:t>품질 리포트 · 격리 큐</a:t>
                       </a:r>
-                      <a:endParaRPr lang="en-US" sz="1250" dirty="0">
+                      <a:endParaRPr lang="en-US" sz="1500" dirty="0">
                         <a:latin typeface="Malgun Gothic" charset="0"/>
                         <a:ea typeface="Malgun Gothic" charset="0"/>
                         <a:cs typeface="Malgun Gothic" charset="0"/>
@@ -4591,7 +4591,7 @@
                   </a:tcPr>
                 </a:tc>
               </a:tr>
-              <a:tr h="566928">
+              <a:tr h="777240">
                 <a:tc>
                   <a:txBody>
                     <a:bodyPr/>
@@ -4601,7 +4601,7 @@
                         <a:buNone/>
                       </a:pPr>
                       <a:r>
-                        <a:rPr lang="en-US" sz="1250" b="1" dirty="0">
+                        <a:rPr lang="en-US" sz="1600" b="1" dirty="0">
                           <a:solidFill>
                             <a:srgbClr val="6E3A1C"/>
                           </a:solidFill>
@@ -4611,7 +4611,7 @@
                         </a:rPr>
                         <a:t>카드 승인자</a:t>
                       </a:r>
-                      <a:endParaRPr lang="en-US" sz="1250" dirty="0">
+                      <a:endParaRPr lang="en-US" sz="1600" dirty="0">
                         <a:latin typeface="Malgun Gothic" charset="0"/>
                         <a:ea typeface="Malgun Gothic" charset="0"/>
                         <a:cs typeface="Malgun Gothic" charset="0"/>
@@ -4669,7 +4669,7 @@
                         <a:buNone/>
                       </a:pPr>
                       <a:r>
-                        <a:rPr lang="en-US" sz="1250" dirty="0">
+                        <a:rPr lang="en-US" sz="1500" dirty="0">
                           <a:solidFill>
                             <a:srgbClr val="2E241C"/>
                           </a:solidFill>
@@ -4679,7 +4679,7 @@
                         </a:rPr>
                         <a:t>판단 카드 승인/반려 — 발주·생산계획·정비·SOP 개정</a:t>
                       </a:r>
-                      <a:endParaRPr lang="en-US" sz="1250" dirty="0">
+                      <a:endParaRPr lang="en-US" sz="1500" dirty="0">
                         <a:latin typeface="Malgun Gothic" charset="0"/>
                         <a:ea typeface="Malgun Gothic" charset="0"/>
                         <a:cs typeface="Malgun Gothic" charset="0"/>
@@ -4737,7 +4737,7 @@
                         <a:buNone/>
                       </a:pPr>
                       <a:r>
-                        <a:rPr lang="en-US" sz="1250" dirty="0">
+                        <a:rPr lang="en-US" sz="1500" b="1" dirty="0">
                           <a:solidFill>
                             <a:srgbClr val="2E241C"/>
                           </a:solidFill>
@@ -4747,7 +4747,7 @@
                         </a:rPr>
                         <a:t>일 20분</a:t>
                       </a:r>
-                      <a:endParaRPr lang="en-US" sz="1250" dirty="0">
+                      <a:endParaRPr lang="en-US" sz="1500" dirty="0">
                         <a:latin typeface="Malgun Gothic" charset="0"/>
                         <a:ea typeface="Malgun Gothic" charset="0"/>
                         <a:cs typeface="Malgun Gothic" charset="0"/>
@@ -4805,7 +4805,7 @@
                         <a:buNone/>
                       </a:pPr>
                       <a:r>
-                        <a:rPr lang="en-US" sz="1250" dirty="0">
+                        <a:rPr lang="en-US" sz="1500" dirty="0">
                           <a:solidFill>
                             <a:srgbClr val="2E241C"/>
                           </a:solidFill>
@@ -4815,7 +4815,7 @@
                         </a:rPr>
                         <a:t>승인함(/inbox)</a:t>
                       </a:r>
-                      <a:endParaRPr lang="en-US" sz="1250" dirty="0">
+                      <a:endParaRPr lang="en-US" sz="1500" dirty="0">
                         <a:latin typeface="Malgun Gothic" charset="0"/>
                         <a:ea typeface="Malgun Gothic" charset="0"/>
                         <a:cs typeface="Malgun Gothic" charset="0"/>
@@ -4865,7 +4865,7 @@
                   </a:tcPr>
                 </a:tc>
               </a:tr>
-              <a:tr h="566928">
+              <a:tr h="777240">
                 <a:tc>
                   <a:txBody>
                     <a:bodyPr/>
@@ -4875,7 +4875,7 @@
                         <a:buNone/>
                       </a:pPr>
                       <a:r>
-                        <a:rPr lang="en-US" sz="1250" b="1" dirty="0">
+                        <a:rPr lang="en-US" sz="1600" b="1" dirty="0">
                           <a:solidFill>
                             <a:srgbClr val="6E3A1C"/>
                           </a:solidFill>
@@ -4885,7 +4885,7 @@
                         </a:rPr>
                         <a:t>현장 리더</a:t>
                       </a:r>
-                      <a:endParaRPr lang="en-US" sz="1250" dirty="0">
+                      <a:endParaRPr lang="en-US" sz="1600" dirty="0">
                         <a:latin typeface="Malgun Gothic" charset="0"/>
                         <a:ea typeface="Malgun Gothic" charset="0"/>
                         <a:cs typeface="Malgun Gothic" charset="0"/>
@@ -4943,7 +4943,7 @@
                         <a:buNone/>
                       </a:pPr>
                       <a:r>
-                        <a:rPr lang="en-US" sz="1250" dirty="0">
+                        <a:rPr lang="en-US" sz="1500" dirty="0">
                           <a:solidFill>
                             <a:srgbClr val="2E241C"/>
                           </a:solidFill>
@@ -4953,7 +4953,7 @@
                         </a:rPr>
                         <a:t>아침 회의 진행 · 장표 폼 입력 관리(생산일지·점검표·폐기)</a:t>
                       </a:r>
-                      <a:endParaRPr lang="en-US" sz="1250" dirty="0">
+                      <a:endParaRPr lang="en-US" sz="1500" dirty="0">
                         <a:latin typeface="Malgun Gothic" charset="0"/>
                         <a:ea typeface="Malgun Gothic" charset="0"/>
                         <a:cs typeface="Malgun Gothic" charset="0"/>
@@ -5011,7 +5011,7 @@
                         <a:buNone/>
                       </a:pPr>
                       <a:r>
-                        <a:rPr lang="en-US" sz="1250" dirty="0">
+                        <a:rPr lang="en-US" sz="1500" b="1" dirty="0">
                           <a:solidFill>
                             <a:srgbClr val="2E241C"/>
                           </a:solidFill>
@@ -5021,7 +5021,7 @@
                         </a:rPr>
                         <a:t>일 15분</a:t>
                       </a:r>
-                      <a:endParaRPr lang="en-US" sz="1250" dirty="0">
+                      <a:endParaRPr lang="en-US" sz="1500" dirty="0">
                         <a:latin typeface="Malgun Gothic" charset="0"/>
                         <a:ea typeface="Malgun Gothic" charset="0"/>
                         <a:cs typeface="Malgun Gothic" charset="0"/>
@@ -5079,7 +5079,7 @@
                         <a:buNone/>
                       </a:pPr>
                       <a:r>
-                        <a:rPr lang="en-US" sz="1250" dirty="0">
+                        <a:rPr lang="en-US" sz="1500" dirty="0">
                           <a:solidFill>
                             <a:srgbClr val="2E241C"/>
                           </a:solidFill>
@@ -5089,7 +5089,7 @@
                         </a:rPr>
                         <a:t>아침 브리핑 · 현장 보드</a:t>
                       </a:r>
-                      <a:endParaRPr lang="en-US" sz="1250" dirty="0">
+                      <a:endParaRPr lang="en-US" sz="1500" dirty="0">
                         <a:latin typeface="Malgun Gothic" charset="0"/>
                         <a:ea typeface="Malgun Gothic" charset="0"/>
                         <a:cs typeface="Malgun Gothic" charset="0"/>
@@ -5139,7 +5139,7 @@
                   </a:tcPr>
                 </a:tc>
               </a:tr>
-              <a:tr h="566928">
+              <a:tr h="777240">
                 <a:tc>
                   <a:txBody>
                     <a:bodyPr/>
@@ -5149,7 +5149,7 @@
                         <a:buNone/>
                       </a:pPr>
                       <a:r>
-                        <a:rPr lang="en-US" sz="1250" b="1" dirty="0">
+                        <a:rPr lang="en-US" sz="1600" b="1" dirty="0">
                           <a:solidFill>
                             <a:srgbClr val="6E3A1C"/>
                           </a:solidFill>
@@ -5159,7 +5159,7 @@
                         </a:rPr>
                         <a:t>시스템 관리자</a:t>
                       </a:r>
-                      <a:endParaRPr lang="en-US" sz="1250" dirty="0">
+                      <a:endParaRPr lang="en-US" sz="1600" dirty="0">
                         <a:latin typeface="Malgun Gothic" charset="0"/>
                         <a:ea typeface="Malgun Gothic" charset="0"/>
                         <a:cs typeface="Malgun Gothic" charset="0"/>
@@ -5217,7 +5217,7 @@
                         <a:buNone/>
                       </a:pPr>
                       <a:r>
-                        <a:rPr lang="en-US" sz="1250" dirty="0">
+                        <a:rPr lang="en-US" sz="1500" dirty="0">
                           <a:solidFill>
                             <a:srgbClr val="2E241C"/>
                           </a:solidFill>
@@ -5227,7 +5227,7 @@
                         </a:rPr>
                         <a:t>야간 배치 확인 · 백업 확인 · 계정 관리 — ASC가 원격 지원</a:t>
                       </a:r>
-                      <a:endParaRPr lang="en-US" sz="1250" dirty="0">
+                      <a:endParaRPr lang="en-US" sz="1500" dirty="0">
                         <a:latin typeface="Malgun Gothic" charset="0"/>
                         <a:ea typeface="Malgun Gothic" charset="0"/>
                         <a:cs typeface="Malgun Gothic" charset="0"/>
@@ -5285,7 +5285,7 @@
                         <a:buNone/>
                       </a:pPr>
                       <a:r>
-                        <a:rPr lang="en-US" sz="1250" dirty="0">
+                        <a:rPr lang="en-US" sz="1500" b="1" dirty="0">
                           <a:solidFill>
                             <a:srgbClr val="2E241C"/>
                           </a:solidFill>
@@ -5295,7 +5295,7 @@
                         </a:rPr>
                         <a:t>주 1시간</a:t>
                       </a:r>
-                      <a:endParaRPr lang="en-US" sz="1250" dirty="0">
+                      <a:endParaRPr lang="en-US" sz="1500" dirty="0">
                         <a:latin typeface="Malgun Gothic" charset="0"/>
                         <a:ea typeface="Malgun Gothic" charset="0"/>
                         <a:cs typeface="Malgun Gothic" charset="0"/>
@@ -5353,7 +5353,7 @@
                         <a:buNone/>
                       </a:pPr>
                       <a:r>
-                        <a:rPr lang="en-US" sz="1250" dirty="0">
+                        <a:rPr lang="en-US" sz="1500" dirty="0">
                           <a:solidFill>
                             <a:srgbClr val="2E241C"/>
                           </a:solidFill>
@@ -5363,7 +5363,7 @@
                         </a:rPr>
                         <a:t>War Room · 로그</a:t>
                       </a:r>
-                      <a:endParaRPr lang="en-US" sz="1250" dirty="0">
+                      <a:endParaRPr lang="en-US" sz="1500" dirty="0">
                         <a:latin typeface="Malgun Gothic" charset="0"/>
                         <a:ea typeface="Malgun Gothic" charset="0"/>
                         <a:cs typeface="Malgun Gothic" charset="0"/>
@@ -5425,8 +5425,8 @@
         </p:nvSpPr>
         <p:spPr>
           <a:xfrm>
-            <a:off x="566928" y="5074920"/>
-            <a:ext cx="11055096" cy="502920"/>
+            <a:off x="566928" y="5806440"/>
+            <a:ext cx="11055096" cy="548640"/>
           </a:xfrm>
           <a:prstGeom prst="rect">
             <a:avLst/>
@@ -5444,7 +5444,7 @@
               <a:buNone/>
             </a:pPr>
             <a:r>
-              <a:rPr lang="en-US" sz="1300" b="1" dirty="0">
+              <a:rPr lang="en-US" sz="1450" b="1" dirty="0">
                 <a:solidFill>
                   <a:srgbClr val="6E3A1C"/>
                 </a:solidFill>
@@ -5458,7 +5458,7 @@
               <a:buNone/>
             </a:pPr>
             <a:r>
-              <a:rPr lang="en-US" sz="1300" dirty="0">
+              <a:rPr lang="en-US" sz="1450" dirty="0">
                 <a:solidFill>
                   <a:srgbClr val="2E241C"/>
                 </a:solidFill>
@@ -5468,7 +5468,7 @@
               </a:rPr>
               <a:t>스튜어드·현장 리더 겸직 1명 + 승인자 1명, 총 2명으로 시작할 수 있습니다. 관리자 몫은 도입 초기 ASC가 대행합니다.</a:t>
             </a:r>
-            <a:endParaRPr lang="en-US" sz="1300" dirty="0"/>
+            <a:endParaRPr lang="en-US" sz="1450" dirty="0"/>
           </a:p>
         </p:txBody>
       </p:sp>

--- a/docs/presentations/BakeryT_Operations_Manual.pptx
+++ b/docs/presentations/BakeryT_Operations_Manual.pptx
@@ -2905,8 +2905,8 @@
         </p:blipFill>
         <p:spPr>
           <a:xfrm>
-            <a:off x="566928" y="1417320"/>
-            <a:ext cx="8138160" cy="4577486"/>
+            <a:off x="566928" y="1371600"/>
+            <a:ext cx="8138160" cy="4577715"/>
           </a:xfrm>
           <a:prstGeom prst="rect">
             <a:avLst/>
@@ -2928,8 +2928,8 @@
         </p:nvSpPr>
         <p:spPr>
           <a:xfrm>
-            <a:off x="8933688" y="1417320"/>
-            <a:ext cx="2688336" cy="365760"/>
+            <a:off x="8906256" y="1371600"/>
+            <a:ext cx="2962656" cy="347472"/>
           </a:xfrm>
           <a:prstGeom prst="rect">
             <a:avLst/>
@@ -2967,8 +2967,8 @@
         </p:nvSpPr>
         <p:spPr>
           <a:xfrm>
-            <a:off x="8933688" y="1874520"/>
-            <a:ext cx="2688336" cy="950976"/>
+            <a:off x="8906256" y="1874520"/>
+            <a:ext cx="2962656" cy="950976"/>
           </a:xfrm>
           <a:prstGeom prst="roundRect">
             <a:avLst>
@@ -2994,8 +2994,8 @@
         </p:nvSpPr>
         <p:spPr>
           <a:xfrm>
-            <a:off x="9043416" y="1929384"/>
-            <a:ext cx="2468880" cy="859536"/>
+            <a:off x="8997696" y="1920240"/>
+            <a:ext cx="2779776" cy="859536"/>
           </a:xfrm>
           <a:prstGeom prst="rect">
             <a:avLst/>
@@ -3048,8 +3048,8 @@
         </p:nvSpPr>
         <p:spPr>
           <a:xfrm>
-            <a:off x="8933688" y="2935224"/>
-            <a:ext cx="2688336" cy="950976"/>
+            <a:off x="8906256" y="2935224"/>
+            <a:ext cx="2962656" cy="950976"/>
           </a:xfrm>
           <a:prstGeom prst="roundRect">
             <a:avLst>
@@ -3075,8 +3075,8 @@
         </p:nvSpPr>
         <p:spPr>
           <a:xfrm>
-            <a:off x="9043416" y="2990088"/>
-            <a:ext cx="2468880" cy="859536"/>
+            <a:off x="8997696" y="2980944"/>
+            <a:ext cx="2779776" cy="859536"/>
           </a:xfrm>
           <a:prstGeom prst="rect">
             <a:avLst/>
@@ -3129,8 +3129,8 @@
         </p:nvSpPr>
         <p:spPr>
           <a:xfrm>
-            <a:off x="8933688" y="3995928"/>
-            <a:ext cx="2688336" cy="950976"/>
+            <a:off x="8906256" y="3995928"/>
+            <a:ext cx="2962656" cy="950976"/>
           </a:xfrm>
           <a:prstGeom prst="roundRect">
             <a:avLst>
@@ -3156,8 +3156,8 @@
         </p:nvSpPr>
         <p:spPr>
           <a:xfrm>
-            <a:off x="9043416" y="4050792"/>
-            <a:ext cx="2468880" cy="859536"/>
+            <a:off x="8997696" y="4041648"/>
+            <a:ext cx="2779776" cy="859536"/>
           </a:xfrm>
           <a:prstGeom prst="rect">
             <a:avLst/>
@@ -3210,8 +3210,8 @@
         </p:nvSpPr>
         <p:spPr>
           <a:xfrm>
-            <a:off x="8933688" y="5056632"/>
-            <a:ext cx="2688336" cy="950976"/>
+            <a:off x="8906256" y="5056632"/>
+            <a:ext cx="2962656" cy="950976"/>
           </a:xfrm>
           <a:prstGeom prst="roundRect">
             <a:avLst>
@@ -3237,8 +3237,8 @@
         </p:nvSpPr>
         <p:spPr>
           <a:xfrm>
-            <a:off x="9043416" y="5111496"/>
-            <a:ext cx="2468880" cy="859536"/>
+            <a:off x="8997696" y="5102352"/>
+            <a:ext cx="2779776" cy="859536"/>
           </a:xfrm>
           <a:prstGeom prst="rect">
             <a:avLst/>
@@ -3468,8 +3468,8 @@
         </p:blipFill>
         <p:spPr>
           <a:xfrm>
-            <a:off x="566928" y="1417320"/>
-            <a:ext cx="8138160" cy="4577486"/>
+            <a:off x="566928" y="1371600"/>
+            <a:ext cx="8732520" cy="4912043"/>
           </a:xfrm>
           <a:prstGeom prst="rect">
             <a:avLst/>
@@ -3491,8 +3491,8 @@
         </p:nvSpPr>
         <p:spPr>
           <a:xfrm>
-            <a:off x="8933688" y="1417320"/>
-            <a:ext cx="2688336" cy="365760"/>
+            <a:off x="9500616" y="1371600"/>
+            <a:ext cx="2368296" cy="347472"/>
           </a:xfrm>
           <a:prstGeom prst="rect">
             <a:avLst/>
@@ -3508,7 +3508,7 @@
               <a:buNone/>
             </a:pPr>
             <a:r>
-              <a:rPr lang="en-US" sz="1400" b="1" dirty="0">
+              <a:rPr lang="en-US" sz="1300" b="1" dirty="0">
                 <a:solidFill>
                   <a:srgbClr val="C07F1E"/>
                 </a:solidFill>
@@ -3518,7 +3518,7 @@
               </a:rPr>
               <a:t>운영 포인트</a:t>
             </a:r>
-            <a:endParaRPr lang="en-US" sz="1400" dirty="0"/>
+            <a:endParaRPr lang="en-US" sz="1300" dirty="0"/>
           </a:p>
         </p:txBody>
       </p:sp>
@@ -3530,12 +3530,12 @@
         </p:nvSpPr>
         <p:spPr>
           <a:xfrm>
-            <a:off x="8933688" y="1874520"/>
-            <a:ext cx="2688336" cy="950976"/>
+            <a:off x="9500616" y="1773936"/>
+            <a:ext cx="2368296" cy="1078992"/>
           </a:xfrm>
           <a:prstGeom prst="roundRect">
             <a:avLst>
-              <a:gd name="adj" fmla="val 5769"/>
+              <a:gd name="adj" fmla="val 5085"/>
             </a:avLst>
           </a:prstGeom>
           <a:solidFill>
@@ -3557,8 +3557,8 @@
         </p:nvSpPr>
         <p:spPr>
           <a:xfrm>
-            <a:off x="9043416" y="1929384"/>
-            <a:ext cx="2468880" cy="859536"/>
+            <a:off x="9592056" y="1819656"/>
+            <a:ext cx="2185416" cy="987552"/>
           </a:xfrm>
           <a:prstGeom prst="rect">
             <a:avLst/>
@@ -3574,7 +3574,7 @@
               <a:buNone/>
             </a:pPr>
             <a:r>
-              <a:rPr lang="en-US" sz="1200" b="1" dirty="0">
+              <a:rPr lang="en-US" sz="1150" b="1" dirty="0">
                 <a:solidFill>
                   <a:srgbClr val="6E3A1C"/>
                 </a:solidFill>
@@ -3589,7 +3589,7 @@
               <a:buNone/>
             </a:pPr>
             <a:r>
-              <a:rPr lang="en-US" sz="1050" dirty="0">
+              <a:rPr lang="en-US" sz="1000" dirty="0">
                 <a:solidFill>
                   <a:srgbClr val="2E241C"/>
                 </a:solidFill>
@@ -3599,7 +3599,7 @@
               </a:rPr>
               <a:t>KPI → 반려 사유 → 에이전트 오류 → 드리프트 → 승급 결정 순 15분</a:t>
             </a:r>
-            <a:endParaRPr lang="en-US" sz="1200" dirty="0"/>
+            <a:endParaRPr lang="en-US" sz="1150" dirty="0"/>
           </a:p>
         </p:txBody>
       </p:sp>
@@ -3611,12 +3611,12 @@
         </p:nvSpPr>
         <p:spPr>
           <a:xfrm>
-            <a:off x="8933688" y="2935224"/>
-            <a:ext cx="2688336" cy="950976"/>
+            <a:off x="9500616" y="2962656"/>
+            <a:ext cx="2368296" cy="1078992"/>
           </a:xfrm>
           <a:prstGeom prst="roundRect">
             <a:avLst>
-              <a:gd name="adj" fmla="val 5769"/>
+              <a:gd name="adj" fmla="val 5085"/>
             </a:avLst>
           </a:prstGeom>
           <a:solidFill>
@@ -3638,8 +3638,8 @@
         </p:nvSpPr>
         <p:spPr>
           <a:xfrm>
-            <a:off x="9043416" y="2990088"/>
-            <a:ext cx="2468880" cy="859536"/>
+            <a:off x="9592056" y="3008376"/>
+            <a:ext cx="2185416" cy="987552"/>
           </a:xfrm>
           <a:prstGeom prst="rect">
             <a:avLst/>
@@ -3655,7 +3655,7 @@
               <a:buNone/>
             </a:pPr>
             <a:r>
-              <a:rPr lang="en-US" sz="1200" b="1" dirty="0">
+              <a:rPr lang="en-US" sz="1150" b="1" dirty="0">
                 <a:solidFill>
                   <a:srgbClr val="6E3A1C"/>
                 </a:solidFill>
@@ -3670,7 +3670,7 @@
               <a:buNone/>
             </a:pPr>
             <a:r>
-              <a:rPr lang="en-US" sz="1050" dirty="0">
+              <a:rPr lang="en-US" sz="1000" dirty="0">
                 <a:solidFill>
                   <a:srgbClr val="2E241C"/>
                 </a:solidFill>
@@ -3680,7 +3680,7 @@
               </a:rPr>
               <a:t>5개 리스크 녹/황/적 — 적신호는 당일 조치 원칙</a:t>
             </a:r>
-            <a:endParaRPr lang="en-US" sz="1200" dirty="0"/>
+            <a:endParaRPr lang="en-US" sz="1150" dirty="0"/>
           </a:p>
         </p:txBody>
       </p:sp>
@@ -3692,12 +3692,12 @@
         </p:nvSpPr>
         <p:spPr>
           <a:xfrm>
-            <a:off x="8933688" y="3995928"/>
-            <a:ext cx="2688336" cy="950976"/>
+            <a:off x="9500616" y="4151376"/>
+            <a:ext cx="2368296" cy="1078992"/>
           </a:xfrm>
           <a:prstGeom prst="roundRect">
             <a:avLst>
-              <a:gd name="adj" fmla="val 5769"/>
+              <a:gd name="adj" fmla="val 5085"/>
             </a:avLst>
           </a:prstGeom>
           <a:solidFill>
@@ -3719,8 +3719,8 @@
         </p:nvSpPr>
         <p:spPr>
           <a:xfrm>
-            <a:off x="9043416" y="4050792"/>
-            <a:ext cx="2468880" cy="859536"/>
+            <a:off x="9592056" y="4197096"/>
+            <a:ext cx="2185416" cy="987552"/>
           </a:xfrm>
           <a:prstGeom prst="rect">
             <a:avLst/>
@@ -3736,7 +3736,7 @@
               <a:buNone/>
             </a:pPr>
             <a:r>
-              <a:rPr lang="en-US" sz="1200" b="1" dirty="0">
+              <a:rPr lang="en-US" sz="1150" b="1" dirty="0">
                 <a:solidFill>
                   <a:srgbClr val="6E3A1C"/>
                 </a:solidFill>
@@ -3751,7 +3751,7 @@
               <a:buNone/>
             </a:pPr>
             <a:r>
-              <a:rPr lang="en-US" sz="1050" dirty="0">
+              <a:rPr lang="en-US" sz="1000" dirty="0">
                 <a:solidFill>
                   <a:srgbClr val="2E241C"/>
                 </a:solidFill>
@@ -3761,7 +3761,7 @@
               </a:rPr>
               <a:t>결정 사항만 남깁니다 — 수치는 화면이 이미 기록</a:t>
             </a:r>
-            <a:endParaRPr lang="en-US" sz="1200" dirty="0"/>
+            <a:endParaRPr lang="en-US" sz="1150" dirty="0"/>
           </a:p>
         </p:txBody>
       </p:sp>
@@ -3773,12 +3773,12 @@
         </p:nvSpPr>
         <p:spPr>
           <a:xfrm>
-            <a:off x="8933688" y="5056632"/>
-            <a:ext cx="2688336" cy="950976"/>
+            <a:off x="9500616" y="5340096"/>
+            <a:ext cx="2368296" cy="1078992"/>
           </a:xfrm>
           <a:prstGeom prst="roundRect">
             <a:avLst>
-              <a:gd name="adj" fmla="val 5769"/>
+              <a:gd name="adj" fmla="val 5085"/>
             </a:avLst>
           </a:prstGeom>
           <a:solidFill>
@@ -3800,8 +3800,8 @@
         </p:nvSpPr>
         <p:spPr>
           <a:xfrm>
-            <a:off x="9043416" y="5111496"/>
-            <a:ext cx="2468880" cy="859536"/>
+            <a:off x="9592056" y="5385816"/>
+            <a:ext cx="2185416" cy="987552"/>
           </a:xfrm>
           <a:prstGeom prst="rect">
             <a:avLst/>
@@ -3817,7 +3817,7 @@
               <a:buNone/>
             </a:pPr>
             <a:r>
-              <a:rPr lang="en-US" sz="1200" b="1" dirty="0">
+              <a:rPr lang="en-US" sz="1150" b="1" dirty="0">
                 <a:solidFill>
                   <a:srgbClr val="6E3A1C"/>
                 </a:solidFill>
@@ -3832,7 +3832,7 @@
               <a:buNone/>
             </a:pPr>
             <a:r>
-              <a:rPr lang="en-US" sz="1050" dirty="0">
+              <a:rPr lang="en-US" sz="1000" dirty="0">
                 <a:solidFill>
                   <a:srgbClr val="2E241C"/>
                 </a:solidFill>
@@ -3842,7 +3842,7 @@
               </a:rPr>
               <a:t>대표 · 공장장 · 주 1회</a:t>
             </a:r>
-            <a:endParaRPr lang="en-US" sz="1200" dirty="0"/>
+            <a:endParaRPr lang="en-US" sz="1150" dirty="0"/>
           </a:p>
         </p:txBody>
       </p:sp>
@@ -16670,8 +16670,8 @@
         </p:blipFill>
         <p:spPr>
           <a:xfrm>
-            <a:off x="566928" y="1417320"/>
-            <a:ext cx="8138160" cy="4577486"/>
+            <a:off x="566928" y="1371600"/>
+            <a:ext cx="8138160" cy="4577715"/>
           </a:xfrm>
           <a:prstGeom prst="rect">
             <a:avLst/>
@@ -16693,8 +16693,8 @@
         </p:nvSpPr>
         <p:spPr>
           <a:xfrm>
-            <a:off x="8933688" y="1417320"/>
-            <a:ext cx="2688336" cy="365760"/>
+            <a:off x="8906256" y="1371600"/>
+            <a:ext cx="2962656" cy="347472"/>
           </a:xfrm>
           <a:prstGeom prst="rect">
             <a:avLst/>
@@ -16732,8 +16732,8 @@
         </p:nvSpPr>
         <p:spPr>
           <a:xfrm>
-            <a:off x="8933688" y="1874520"/>
-            <a:ext cx="2688336" cy="950976"/>
+            <a:off x="8906256" y="1874520"/>
+            <a:ext cx="2962656" cy="950976"/>
           </a:xfrm>
           <a:prstGeom prst="roundRect">
             <a:avLst>
@@ -16759,8 +16759,8 @@
         </p:nvSpPr>
         <p:spPr>
           <a:xfrm>
-            <a:off x="9043416" y="1929384"/>
-            <a:ext cx="2468880" cy="859536"/>
+            <a:off x="8997696" y="1920240"/>
+            <a:ext cx="2779776" cy="859536"/>
           </a:xfrm>
           <a:prstGeom prst="rect">
             <a:avLst/>
@@ -16813,8 +16813,8 @@
         </p:nvSpPr>
         <p:spPr>
           <a:xfrm>
-            <a:off x="8933688" y="2935224"/>
-            <a:ext cx="2688336" cy="950976"/>
+            <a:off x="8906256" y="2935224"/>
+            <a:ext cx="2962656" cy="950976"/>
           </a:xfrm>
           <a:prstGeom prst="roundRect">
             <a:avLst>
@@ -16840,8 +16840,8 @@
         </p:nvSpPr>
         <p:spPr>
           <a:xfrm>
-            <a:off x="9043416" y="2990088"/>
-            <a:ext cx="2468880" cy="859536"/>
+            <a:off x="8997696" y="2980944"/>
+            <a:ext cx="2779776" cy="859536"/>
           </a:xfrm>
           <a:prstGeom prst="rect">
             <a:avLst/>
@@ -16894,8 +16894,8 @@
         </p:nvSpPr>
         <p:spPr>
           <a:xfrm>
-            <a:off x="8933688" y="3995928"/>
-            <a:ext cx="2688336" cy="950976"/>
+            <a:off x="8906256" y="3995928"/>
+            <a:ext cx="2962656" cy="950976"/>
           </a:xfrm>
           <a:prstGeom prst="roundRect">
             <a:avLst>
@@ -16921,8 +16921,8 @@
         </p:nvSpPr>
         <p:spPr>
           <a:xfrm>
-            <a:off x="9043416" y="4050792"/>
-            <a:ext cx="2468880" cy="859536"/>
+            <a:off x="8997696" y="4041648"/>
+            <a:ext cx="2779776" cy="859536"/>
           </a:xfrm>
           <a:prstGeom prst="rect">
             <a:avLst/>
@@ -16975,8 +16975,8 @@
         </p:nvSpPr>
         <p:spPr>
           <a:xfrm>
-            <a:off x="8933688" y="5056632"/>
-            <a:ext cx="2688336" cy="950976"/>
+            <a:off x="8906256" y="5056632"/>
+            <a:ext cx="2962656" cy="950976"/>
           </a:xfrm>
           <a:prstGeom prst="roundRect">
             <a:avLst>
@@ -17002,8 +17002,8 @@
         </p:nvSpPr>
         <p:spPr>
           <a:xfrm>
-            <a:off x="9043416" y="5111496"/>
-            <a:ext cx="2468880" cy="859536"/>
+            <a:off x="8997696" y="5102352"/>
+            <a:ext cx="2779776" cy="859536"/>
           </a:xfrm>
           <a:prstGeom prst="rect">
             <a:avLst/>
@@ -17233,8 +17233,8 @@
         </p:blipFill>
         <p:spPr>
           <a:xfrm>
-            <a:off x="566928" y="1417320"/>
-            <a:ext cx="8138160" cy="4577486"/>
+            <a:off x="566928" y="1371600"/>
+            <a:ext cx="8138160" cy="4577715"/>
           </a:xfrm>
           <a:prstGeom prst="rect">
             <a:avLst/>
@@ -17256,8 +17256,8 @@
         </p:nvSpPr>
         <p:spPr>
           <a:xfrm>
-            <a:off x="8933688" y="1417320"/>
-            <a:ext cx="2688336" cy="365760"/>
+            <a:off x="8906256" y="1371600"/>
+            <a:ext cx="2962656" cy="347472"/>
           </a:xfrm>
           <a:prstGeom prst="rect">
             <a:avLst/>
@@ -17295,8 +17295,8 @@
         </p:nvSpPr>
         <p:spPr>
           <a:xfrm>
-            <a:off x="8933688" y="1874520"/>
-            <a:ext cx="2688336" cy="950976"/>
+            <a:off x="8906256" y="1874520"/>
+            <a:ext cx="2962656" cy="950976"/>
           </a:xfrm>
           <a:prstGeom prst="roundRect">
             <a:avLst>
@@ -17322,8 +17322,8 @@
         </p:nvSpPr>
         <p:spPr>
           <a:xfrm>
-            <a:off x="9043416" y="1929384"/>
-            <a:ext cx="2468880" cy="859536"/>
+            <a:off x="8997696" y="1920240"/>
+            <a:ext cx="2779776" cy="859536"/>
           </a:xfrm>
           <a:prstGeom prst="rect">
             <a:avLst/>
@@ -17376,8 +17376,8 @@
         </p:nvSpPr>
         <p:spPr>
           <a:xfrm>
-            <a:off x="8933688" y="2935224"/>
-            <a:ext cx="2688336" cy="950976"/>
+            <a:off x="8906256" y="2935224"/>
+            <a:ext cx="2962656" cy="950976"/>
           </a:xfrm>
           <a:prstGeom prst="roundRect">
             <a:avLst>
@@ -17403,8 +17403,8 @@
         </p:nvSpPr>
         <p:spPr>
           <a:xfrm>
-            <a:off x="9043416" y="2990088"/>
-            <a:ext cx="2468880" cy="859536"/>
+            <a:off x="8997696" y="2980944"/>
+            <a:ext cx="2779776" cy="859536"/>
           </a:xfrm>
           <a:prstGeom prst="rect">
             <a:avLst/>
@@ -17457,8 +17457,8 @@
         </p:nvSpPr>
         <p:spPr>
           <a:xfrm>
-            <a:off x="8933688" y="3995928"/>
-            <a:ext cx="2688336" cy="950976"/>
+            <a:off x="8906256" y="3995928"/>
+            <a:ext cx="2962656" cy="950976"/>
           </a:xfrm>
           <a:prstGeom prst="roundRect">
             <a:avLst>
@@ -17484,8 +17484,8 @@
         </p:nvSpPr>
         <p:spPr>
           <a:xfrm>
-            <a:off x="9043416" y="4050792"/>
-            <a:ext cx="2468880" cy="859536"/>
+            <a:off x="8997696" y="4041648"/>
+            <a:ext cx="2779776" cy="859536"/>
           </a:xfrm>
           <a:prstGeom prst="rect">
             <a:avLst/>
@@ -17538,8 +17538,8 @@
         </p:nvSpPr>
         <p:spPr>
           <a:xfrm>
-            <a:off x="8933688" y="5056632"/>
-            <a:ext cx="2688336" cy="950976"/>
+            <a:off x="8906256" y="5056632"/>
+            <a:ext cx="2962656" cy="950976"/>
           </a:xfrm>
           <a:prstGeom prst="roundRect">
             <a:avLst>
@@ -17565,8 +17565,8 @@
         </p:nvSpPr>
         <p:spPr>
           <a:xfrm>
-            <a:off x="9043416" y="5111496"/>
-            <a:ext cx="2468880" cy="859536"/>
+            <a:off x="8997696" y="5102352"/>
+            <a:ext cx="2779776" cy="859536"/>
           </a:xfrm>
           <a:prstGeom prst="rect">
             <a:avLst/>
@@ -17796,8 +17796,8 @@
         </p:blipFill>
         <p:spPr>
           <a:xfrm>
-            <a:off x="566928" y="1417320"/>
-            <a:ext cx="8138160" cy="4577486"/>
+            <a:off x="566928" y="1371600"/>
+            <a:ext cx="8138160" cy="4577715"/>
           </a:xfrm>
           <a:prstGeom prst="rect">
             <a:avLst/>
@@ -17819,8 +17819,8 @@
         </p:nvSpPr>
         <p:spPr>
           <a:xfrm>
-            <a:off x="8933688" y="1417320"/>
-            <a:ext cx="2688336" cy="365760"/>
+            <a:off x="8906256" y="1371600"/>
+            <a:ext cx="2962656" cy="347472"/>
           </a:xfrm>
           <a:prstGeom prst="rect">
             <a:avLst/>
@@ -17858,8 +17858,8 @@
         </p:nvSpPr>
         <p:spPr>
           <a:xfrm>
-            <a:off x="8933688" y="1874520"/>
-            <a:ext cx="2688336" cy="950976"/>
+            <a:off x="8906256" y="1874520"/>
+            <a:ext cx="2962656" cy="950976"/>
           </a:xfrm>
           <a:prstGeom prst="roundRect">
             <a:avLst>
@@ -17885,8 +17885,8 @@
         </p:nvSpPr>
         <p:spPr>
           <a:xfrm>
-            <a:off x="9043416" y="1929384"/>
-            <a:ext cx="2468880" cy="859536"/>
+            <a:off x="8997696" y="1920240"/>
+            <a:ext cx="2779776" cy="859536"/>
           </a:xfrm>
           <a:prstGeom prst="rect">
             <a:avLst/>
@@ -17939,8 +17939,8 @@
         </p:nvSpPr>
         <p:spPr>
           <a:xfrm>
-            <a:off x="8933688" y="2935224"/>
-            <a:ext cx="2688336" cy="950976"/>
+            <a:off x="8906256" y="2935224"/>
+            <a:ext cx="2962656" cy="950976"/>
           </a:xfrm>
           <a:prstGeom prst="roundRect">
             <a:avLst>
@@ -17966,8 +17966,8 @@
         </p:nvSpPr>
         <p:spPr>
           <a:xfrm>
-            <a:off x="9043416" y="2990088"/>
-            <a:ext cx="2468880" cy="859536"/>
+            <a:off x="8997696" y="2980944"/>
+            <a:ext cx="2779776" cy="859536"/>
           </a:xfrm>
           <a:prstGeom prst="rect">
             <a:avLst/>
@@ -18020,8 +18020,8 @@
         </p:nvSpPr>
         <p:spPr>
           <a:xfrm>
-            <a:off x="8933688" y="3995928"/>
-            <a:ext cx="2688336" cy="950976"/>
+            <a:off x="8906256" y="3995928"/>
+            <a:ext cx="2962656" cy="950976"/>
           </a:xfrm>
           <a:prstGeom prst="roundRect">
             <a:avLst>
@@ -18047,8 +18047,8 @@
         </p:nvSpPr>
         <p:spPr>
           <a:xfrm>
-            <a:off x="9043416" y="4050792"/>
-            <a:ext cx="2468880" cy="859536"/>
+            <a:off x="8997696" y="4041648"/>
+            <a:ext cx="2779776" cy="859536"/>
           </a:xfrm>
           <a:prstGeom prst="rect">
             <a:avLst/>
@@ -18101,8 +18101,8 @@
         </p:nvSpPr>
         <p:spPr>
           <a:xfrm>
-            <a:off x="8933688" y="5056632"/>
-            <a:ext cx="2688336" cy="950976"/>
+            <a:off x="8906256" y="5056632"/>
+            <a:ext cx="2962656" cy="950976"/>
           </a:xfrm>
           <a:prstGeom prst="roundRect">
             <a:avLst>
@@ -18128,8 +18128,8 @@
         </p:nvSpPr>
         <p:spPr>
           <a:xfrm>
-            <a:off x="9043416" y="5111496"/>
-            <a:ext cx="2468880" cy="859536"/>
+            <a:off x="8997696" y="5102352"/>
+            <a:ext cx="2779776" cy="859536"/>
           </a:xfrm>
           <a:prstGeom prst="rect">
             <a:avLst/>
@@ -18359,8 +18359,8 @@
         </p:blipFill>
         <p:spPr>
           <a:xfrm>
-            <a:off x="566928" y="1417320"/>
-            <a:ext cx="8138160" cy="4577486"/>
+            <a:off x="566928" y="1371600"/>
+            <a:ext cx="8732520" cy="4912043"/>
           </a:xfrm>
           <a:prstGeom prst="rect">
             <a:avLst/>
@@ -18382,8 +18382,8 @@
         </p:nvSpPr>
         <p:spPr>
           <a:xfrm>
-            <a:off x="8933688" y="1417320"/>
-            <a:ext cx="2688336" cy="365760"/>
+            <a:off x="9500616" y="1371600"/>
+            <a:ext cx="2368296" cy="347472"/>
           </a:xfrm>
           <a:prstGeom prst="rect">
             <a:avLst/>
@@ -18399,7 +18399,7 @@
               <a:buNone/>
             </a:pPr>
             <a:r>
-              <a:rPr lang="en-US" sz="1400" b="1" dirty="0">
+              <a:rPr lang="en-US" sz="1300" b="1" dirty="0">
                 <a:solidFill>
                   <a:srgbClr val="C07F1E"/>
                 </a:solidFill>
@@ -18409,7 +18409,7 @@
               </a:rPr>
               <a:t>운영 포인트</a:t>
             </a:r>
-            <a:endParaRPr lang="en-US" sz="1400" dirty="0"/>
+            <a:endParaRPr lang="en-US" sz="1300" dirty="0"/>
           </a:p>
         </p:txBody>
       </p:sp>
@@ -18421,12 +18421,12 @@
         </p:nvSpPr>
         <p:spPr>
           <a:xfrm>
-            <a:off x="8933688" y="1874520"/>
-            <a:ext cx="2688336" cy="950976"/>
+            <a:off x="9500616" y="1773936"/>
+            <a:ext cx="2368296" cy="1078992"/>
           </a:xfrm>
           <a:prstGeom prst="roundRect">
             <a:avLst>
-              <a:gd name="adj" fmla="val 5769"/>
+              <a:gd name="adj" fmla="val 5085"/>
             </a:avLst>
           </a:prstGeom>
           <a:solidFill>
@@ -18448,8 +18448,8 @@
         </p:nvSpPr>
         <p:spPr>
           <a:xfrm>
-            <a:off x="9043416" y="1929384"/>
-            <a:ext cx="2468880" cy="859536"/>
+            <a:off x="9592056" y="1819656"/>
+            <a:ext cx="2185416" cy="987552"/>
           </a:xfrm>
           <a:prstGeom prst="rect">
             <a:avLst/>
@@ -18465,7 +18465,7 @@
               <a:buNone/>
             </a:pPr>
             <a:r>
-              <a:rPr lang="en-US" sz="1200" b="1" dirty="0">
+              <a:rPr lang="en-US" sz="1150" b="1" dirty="0">
                 <a:solidFill>
                   <a:srgbClr val="6E3A1C"/>
                 </a:solidFill>
@@ -18480,7 +18480,7 @@
               <a:buNone/>
             </a:pPr>
             <a:r>
-              <a:rPr lang="en-US" sz="1050" dirty="0">
+              <a:rPr lang="en-US" sz="1000" dirty="0">
                 <a:solidFill>
                   <a:srgbClr val="2E241C"/>
                 </a:solidFill>
@@ -18490,7 +18490,7 @@
               </a:rPr>
               <a:t>수치 + 구간(P10~P90) + 〔근거〕 + 대안이 한 장에</a:t>
             </a:r>
-            <a:endParaRPr lang="en-US" sz="1200" dirty="0"/>
+            <a:endParaRPr lang="en-US" sz="1150" dirty="0"/>
           </a:p>
         </p:txBody>
       </p:sp>
@@ -18502,12 +18502,12 @@
         </p:nvSpPr>
         <p:spPr>
           <a:xfrm>
-            <a:off x="8933688" y="2935224"/>
-            <a:ext cx="2688336" cy="950976"/>
+            <a:off x="9500616" y="2962656"/>
+            <a:ext cx="2368296" cy="1078992"/>
           </a:xfrm>
           <a:prstGeom prst="roundRect">
             <a:avLst>
-              <a:gd name="adj" fmla="val 5769"/>
+              <a:gd name="adj" fmla="val 5085"/>
             </a:avLst>
           </a:prstGeom>
           <a:solidFill>
@@ -18529,8 +18529,8 @@
         </p:nvSpPr>
         <p:spPr>
           <a:xfrm>
-            <a:off x="9043416" y="2990088"/>
-            <a:ext cx="2468880" cy="859536"/>
+            <a:off x="9592056" y="3008376"/>
+            <a:ext cx="2185416" cy="987552"/>
           </a:xfrm>
           <a:prstGeom prst="rect">
             <a:avLst/>
@@ -18546,7 +18546,7 @@
               <a:buNone/>
             </a:pPr>
             <a:r>
-              <a:rPr lang="en-US" sz="1200" b="1" dirty="0">
+              <a:rPr lang="en-US" sz="1150" b="1" dirty="0">
                 <a:solidFill>
                   <a:srgbClr val="6E3A1C"/>
                 </a:solidFill>
@@ -18561,7 +18561,7 @@
               <a:buNone/>
             </a:pPr>
             <a:r>
-              <a:rPr lang="en-US" sz="1050" dirty="0">
+              <a:rPr lang="en-US" sz="1000" dirty="0">
                 <a:solidFill>
                   <a:srgbClr val="2E241C"/>
                 </a:solidFill>
@@ -18571,7 +18571,7 @@
               </a:rPr>
               <a:t>'승인 → 환류' 클릭 — 그 순간에만 시스템 값이 바뀝니다</a:t>
             </a:r>
-            <a:endParaRPr lang="en-US" sz="1200" dirty="0"/>
+            <a:endParaRPr lang="en-US" sz="1150" dirty="0"/>
           </a:p>
         </p:txBody>
       </p:sp>
@@ -18583,12 +18583,12 @@
         </p:nvSpPr>
         <p:spPr>
           <a:xfrm>
-            <a:off x="8933688" y="3995928"/>
-            <a:ext cx="2688336" cy="950976"/>
+            <a:off x="9500616" y="4151376"/>
+            <a:ext cx="2368296" cy="1078992"/>
           </a:xfrm>
           <a:prstGeom prst="roundRect">
             <a:avLst>
-              <a:gd name="adj" fmla="val 5769"/>
+              <a:gd name="adj" fmla="val 5085"/>
             </a:avLst>
           </a:prstGeom>
           <a:solidFill>
@@ -18610,8 +18610,8 @@
         </p:nvSpPr>
         <p:spPr>
           <a:xfrm>
-            <a:off x="9043416" y="4050792"/>
-            <a:ext cx="2468880" cy="859536"/>
+            <a:off x="9592056" y="4197096"/>
+            <a:ext cx="2185416" cy="987552"/>
           </a:xfrm>
           <a:prstGeom prst="rect">
             <a:avLst/>
@@ -18627,7 +18627,7 @@
               <a:buNone/>
             </a:pPr>
             <a:r>
-              <a:rPr lang="en-US" sz="1200" b="1" dirty="0">
+              <a:rPr lang="en-US" sz="1150" b="1" dirty="0">
                 <a:solidFill>
                   <a:srgbClr val="6E3A1C"/>
                 </a:solidFill>
@@ -18642,7 +18642,7 @@
               <a:buNone/>
             </a:pPr>
             <a:r>
-              <a:rPr lang="en-US" sz="1050" dirty="0">
+              <a:rPr lang="en-US" sz="1000" dirty="0">
                 <a:solidFill>
                   <a:srgbClr val="2E241C"/>
                 </a:solidFill>
@@ -18652,7 +18652,7 @@
               </a:rPr>
               <a:t>사유 필수(현장 사정·시점 부적절 등) — 다음 학습의 재료</a:t>
             </a:r>
-            <a:endParaRPr lang="en-US" sz="1200" dirty="0"/>
+            <a:endParaRPr lang="en-US" sz="1150" dirty="0"/>
           </a:p>
         </p:txBody>
       </p:sp>
@@ -18664,12 +18664,12 @@
         </p:nvSpPr>
         <p:spPr>
           <a:xfrm>
-            <a:off x="8933688" y="5056632"/>
-            <a:ext cx="2688336" cy="950976"/>
+            <a:off x="9500616" y="5340096"/>
+            <a:ext cx="2368296" cy="1078992"/>
           </a:xfrm>
           <a:prstGeom prst="roundRect">
             <a:avLst>
-              <a:gd name="adj" fmla="val 5769"/>
+              <a:gd name="adj" fmla="val 5085"/>
             </a:avLst>
           </a:prstGeom>
           <a:solidFill>
@@ -18691,8 +18691,8 @@
         </p:nvSpPr>
         <p:spPr>
           <a:xfrm>
-            <a:off x="9043416" y="5111496"/>
-            <a:ext cx="2468880" cy="859536"/>
+            <a:off x="9592056" y="5385816"/>
+            <a:ext cx="2185416" cy="987552"/>
           </a:xfrm>
           <a:prstGeom prst="rect">
             <a:avLst/>
@@ -18708,7 +18708,7 @@
               <a:buNone/>
             </a:pPr>
             <a:r>
-              <a:rPr lang="en-US" sz="1200" b="1" dirty="0">
+              <a:rPr lang="en-US" sz="1150" b="1" dirty="0">
                 <a:solidFill>
                   <a:srgbClr val="6E3A1C"/>
                 </a:solidFill>
@@ -18723,7 +18723,7 @@
               <a:buNone/>
             </a:pPr>
             <a:r>
-              <a:rPr lang="en-US" sz="1050" dirty="0">
+              <a:rPr lang="en-US" sz="1000" dirty="0">
                 <a:solidFill>
                   <a:srgbClr val="2E241C"/>
                 </a:solidFill>
@@ -18733,7 +18733,7 @@
               </a:rPr>
               <a:t>카드 승인자 · 하루 20분</a:t>
             </a:r>
-            <a:endParaRPr lang="en-US" sz="1200" dirty="0"/>
+            <a:endParaRPr lang="en-US" sz="1150" dirty="0"/>
           </a:p>
         </p:txBody>
       </p:sp>
@@ -18922,8 +18922,8 @@
         </p:blipFill>
         <p:spPr>
           <a:xfrm>
-            <a:off x="566928" y="1417320"/>
-            <a:ext cx="8138160" cy="4577486"/>
+            <a:off x="566928" y="1371600"/>
+            <a:ext cx="8138160" cy="4577715"/>
           </a:xfrm>
           <a:prstGeom prst="rect">
             <a:avLst/>
@@ -18945,8 +18945,8 @@
         </p:nvSpPr>
         <p:spPr>
           <a:xfrm>
-            <a:off x="8933688" y="1417320"/>
-            <a:ext cx="2688336" cy="365760"/>
+            <a:off x="8906256" y="1371600"/>
+            <a:ext cx="2962656" cy="347472"/>
           </a:xfrm>
           <a:prstGeom prst="rect">
             <a:avLst/>
@@ -18984,8 +18984,8 @@
         </p:nvSpPr>
         <p:spPr>
           <a:xfrm>
-            <a:off x="8933688" y="1874520"/>
-            <a:ext cx="2688336" cy="950976"/>
+            <a:off x="8906256" y="1874520"/>
+            <a:ext cx="2962656" cy="950976"/>
           </a:xfrm>
           <a:prstGeom prst="roundRect">
             <a:avLst>
@@ -19011,8 +19011,8 @@
         </p:nvSpPr>
         <p:spPr>
           <a:xfrm>
-            <a:off x="9043416" y="1929384"/>
-            <a:ext cx="2468880" cy="859536"/>
+            <a:off x="8997696" y="1920240"/>
+            <a:ext cx="2779776" cy="859536"/>
           </a:xfrm>
           <a:prstGeom prst="rect">
             <a:avLst/>
@@ -19065,8 +19065,8 @@
         </p:nvSpPr>
         <p:spPr>
           <a:xfrm>
-            <a:off x="8933688" y="2935224"/>
-            <a:ext cx="2688336" cy="950976"/>
+            <a:off x="8906256" y="2935224"/>
+            <a:ext cx="2962656" cy="950976"/>
           </a:xfrm>
           <a:prstGeom prst="roundRect">
             <a:avLst>
@@ -19092,8 +19092,8 @@
         </p:nvSpPr>
         <p:spPr>
           <a:xfrm>
-            <a:off x="9043416" y="2990088"/>
-            <a:ext cx="2468880" cy="859536"/>
+            <a:off x="8997696" y="2980944"/>
+            <a:ext cx="2779776" cy="859536"/>
           </a:xfrm>
           <a:prstGeom prst="rect">
             <a:avLst/>
@@ -19146,8 +19146,8 @@
         </p:nvSpPr>
         <p:spPr>
           <a:xfrm>
-            <a:off x="8933688" y="3995928"/>
-            <a:ext cx="2688336" cy="950976"/>
+            <a:off x="8906256" y="3995928"/>
+            <a:ext cx="2962656" cy="950976"/>
           </a:xfrm>
           <a:prstGeom prst="roundRect">
             <a:avLst>
@@ -19173,8 +19173,8 @@
         </p:nvSpPr>
         <p:spPr>
           <a:xfrm>
-            <a:off x="9043416" y="4050792"/>
-            <a:ext cx="2468880" cy="859536"/>
+            <a:off x="8997696" y="4041648"/>
+            <a:ext cx="2779776" cy="859536"/>
           </a:xfrm>
           <a:prstGeom prst="rect">
             <a:avLst/>
@@ -19227,8 +19227,8 @@
         </p:nvSpPr>
         <p:spPr>
           <a:xfrm>
-            <a:off x="8933688" y="5056632"/>
-            <a:ext cx="2688336" cy="950976"/>
+            <a:off x="8906256" y="5056632"/>
+            <a:ext cx="2962656" cy="950976"/>
           </a:xfrm>
           <a:prstGeom prst="roundRect">
             <a:avLst>
@@ -19254,8 +19254,8 @@
         </p:nvSpPr>
         <p:spPr>
           <a:xfrm>
-            <a:off x="9043416" y="5111496"/>
-            <a:ext cx="2468880" cy="859536"/>
+            <a:off x="8997696" y="5102352"/>
+            <a:ext cx="2779776" cy="859536"/>
           </a:xfrm>
           <a:prstGeom prst="rect">
             <a:avLst/>
